--- a/classes/parte-2-criptografia-aplicada/055-pki-certificados-x-509-y-autoridades-de-certificacion/clase-055-presentacion.pptx
+++ b/classes/parte-2-criptografia-aplicada/055-pki-certificados-x-509-y-autoridades-de-certificacion/clase-055-presentacion.pptx
@@ -17,6 +17,9 @@
     <p:sldId id="265" r:id="rId16"/>
     <p:sldId id="266" r:id="rId17"/>
     <p:sldId id="267" r:id="rId18"/>
+    <p:sldId id="268" r:id="rId19"/>
+    <p:sldId id="269" r:id="rId20"/>
+    <p:sldId id="270" r:id="rId21"/>
   </p:sldIdLst>
   <p:sldSz cx="9144000" cy="6858000" type="screen4x3"/>
   <p:notesSz cx="6858000" cy="9144000"/>
@@ -3198,7 +3201,7 @@
                   <a:srgbClr val="0B3D2E"/>
                 </a:solidFill>
               </a:rPr>
-              <a:t>⚠️ Errores comunes</a:t>
+              <a:t>✍️ Ejercicios</a:t>
             </a:r>
           </a:p>
         </p:txBody>
@@ -3236,67 +3239,82 @@
                   <a:srgbClr val="22282E"/>
                 </a:solidFill>
               </a:rPr>
-              <a:t>•  unable to get local issuer certificate — Falta la intermedia; incluye la cadena completa</a:t>
-            </a:r>
-          </a:p>
-          <a:p>
-            <a:pPr>
-              <a:spcAft>
-                <a:spcPts val="600"/>
-              </a:spcAft>
-            </a:pPr>
-            <a:r>
-              <a:rPr sz="1500">
-                <a:solidFill>
-                  <a:srgbClr val="22282E"/>
-                </a:solidFill>
-              </a:rPr>
-              <a:t>•  Navegador rechaza el certificado — CN sin SAN; los navegadores exigen SAN</a:t>
-            </a:r>
-          </a:p>
-          <a:p>
-            <a:pPr>
-              <a:spcAft>
-                <a:spcPts val="600"/>
-              </a:spcAft>
-            </a:pPr>
-            <a:r>
-              <a:rPr sz="1500">
-                <a:solidFill>
-                  <a:srgbClr val="22282E"/>
-                </a:solidFill>
-              </a:rPr>
-              <a:t>•  certificate has expired — Validez vencida; reemite</a:t>
-            </a:r>
-          </a:p>
-          <a:p>
-            <a:pPr>
-              <a:spcAft>
-                <a:spcPts val="600"/>
-              </a:spcAft>
-            </a:pPr>
-            <a:r>
-              <a:rPr sz="1500">
-                <a:solidFill>
-                  <a:srgbClr val="22282E"/>
-                </a:solidFill>
-              </a:rPr>
-              <a:t>•  Confiar en la raíz de laboratorio en producción — Nunca; usa CAs públicas reales</a:t>
-            </a:r>
-          </a:p>
-          <a:p>
-            <a:pPr>
-              <a:spcAft>
-                <a:spcPts val="600"/>
-              </a:spcAft>
-            </a:pPr>
-            <a:r>
-              <a:rPr sz="1500">
-                <a:solidFill>
-                  <a:srgbClr val="22282E"/>
-                </a:solidFill>
-              </a:rPr>
-              <a:t>•  No revocar tras compromiso de clave — Publica CRL/OCSP y reemite</a:t>
+              <a:t>•  Enumera y explica cinco campos de un certificado X.509 real (openssl x509 -text).</a:t>
+            </a:r>
+          </a:p>
+          <a:p>
+            <a:pPr>
+              <a:spcAft>
+                <a:spcPts val="600"/>
+              </a:spcAft>
+            </a:pPr>
+            <a:r>
+              <a:rPr sz="1500">
+                <a:solidFill>
+                  <a:srgbClr val="22282E"/>
+                </a:solidFill>
+              </a:rPr>
+              <a:t>•  Emite un certificado con varias entradas SAN y verifícalo.</a:t>
+            </a:r>
+          </a:p>
+          <a:p>
+            <a:pPr>
+              <a:spcAft>
+                <a:spcPts val="600"/>
+              </a:spcAft>
+            </a:pPr>
+            <a:r>
+              <a:rPr sz="1500">
+                <a:solidFill>
+                  <a:srgbClr val="22282E"/>
+                </a:solidFill>
+              </a:rPr>
+              <a:t>•  Compara CRL, OCSP y OCSP stapling en latencia y privacidad.</a:t>
+            </a:r>
+          </a:p>
+          <a:p>
+            <a:pPr>
+              <a:spcAft>
+                <a:spcPts val="600"/>
+              </a:spcAft>
+            </a:pPr>
+            <a:r>
+              <a:rPr sz="1500">
+                <a:solidFill>
+                  <a:srgbClr val="22282E"/>
+                </a:solidFill>
+              </a:rPr>
+              <a:t>•  Explica qué ocurre si se compromete la clave de una CA raíz.</a:t>
+            </a:r>
+          </a:p>
+          <a:p>
+            <a:pPr>
+              <a:spcAft>
+                <a:spcPts val="600"/>
+              </a:spcAft>
+            </a:pPr>
+            <a:r>
+              <a:rPr sz="1500">
+                <a:solidFill>
+                  <a:srgbClr val="22282E"/>
+                </a:solidFill>
+              </a:rPr>
+              <a:t>•  Investiga el incidente de DigiNotar y sus consecuencias.</a:t>
+            </a:r>
+          </a:p>
+          <a:p>
+            <a:pPr>
+              <a:spcAft>
+                <a:spcPts val="600"/>
+              </a:spcAft>
+            </a:pPr>
+            <a:r>
+              <a:rPr sz="1500">
+                <a:solidFill>
+                  <a:srgbClr val="22282E"/>
+                </a:solidFill>
+              </a:rPr>
+              <a:t>•  Describe el flujo ACME de Let's Encrypt paso a paso.</a:t>
             </a:r>
           </a:p>
         </p:txBody>
@@ -3347,7 +3365,7 @@
                   <a:srgbClr val="0B3D2E"/>
                 </a:solidFill>
               </a:rPr>
-              <a:t>❓ Preguntas frecuentes</a:t>
+              <a:t>📝 Reto verificable</a:t>
             </a:r>
           </a:p>
         </p:txBody>
@@ -3385,82 +3403,7 @@
                   <a:srgbClr val="22282E"/>
                 </a:solidFill>
               </a:rPr>
-              <a:t>•  ❓ ¿Por qué hay CAs intermedias?</a:t>
-            </a:r>
-          </a:p>
-          <a:p>
-            <a:pPr>
-              <a:spcAft>
-                <a:spcPts val="600"/>
-              </a:spcAft>
-            </a:pPr>
-            <a:r>
-              <a:rPr sz="1500">
-                <a:solidFill>
-                  <a:srgbClr val="22282E"/>
-                </a:solidFill>
-              </a:rPr>
-              <a:t>•  Para proteger la raíz (offline) y limitar el daño si se compromete una intermedia, que puede revocarse.</a:t>
-            </a:r>
-          </a:p>
-          <a:p>
-            <a:pPr>
-              <a:spcAft>
-                <a:spcPts val="600"/>
-              </a:spcAft>
-            </a:pPr>
-            <a:r>
-              <a:rPr sz="1500">
-                <a:solidFill>
-                  <a:srgbClr val="22282E"/>
-                </a:solidFill>
-              </a:rPr>
-              <a:t>•  ❓ ¿Cómo confía mi navegador en un sitio?</a:t>
-            </a:r>
-          </a:p>
-          <a:p>
-            <a:pPr>
-              <a:spcAft>
-                <a:spcPts val="600"/>
-              </a:spcAft>
-            </a:pPr>
-            <a:r>
-              <a:rPr sz="1500">
-                <a:solidFill>
-                  <a:srgbClr val="22282E"/>
-                </a:solidFill>
-              </a:rPr>
-              <a:t>•  Valida la cadena de firmas hasta una raíz de su almacén de confianza, comprueba validez, SAN y revocación.</a:t>
-            </a:r>
-          </a:p>
-          <a:p>
-            <a:pPr>
-              <a:spcAft>
-                <a:spcPts val="600"/>
-              </a:spcAft>
-            </a:pPr>
-            <a:r>
-              <a:rPr sz="1500">
-                <a:solidFill>
-                  <a:srgbClr val="22282E"/>
-                </a:solidFill>
-              </a:rPr>
-              <a:t>•  ❓ ¿Qué es el certificate pinning?</a:t>
-            </a:r>
-          </a:p>
-          <a:p>
-            <a:pPr>
-              <a:spcAft>
-                <a:spcPts val="600"/>
-              </a:spcAft>
-            </a:pPr>
-            <a:r>
-              <a:rPr sz="1500">
-                <a:solidFill>
-                  <a:srgbClr val="22282E"/>
-                </a:solidFill>
-              </a:rPr>
-              <a:t>•  Fijar una clave/certificado esperado en la app para no depender solo de la PKI; reduce el riesgo de CA comprometida.</a:t>
+              <a:t>•  Construye una PKI de dos niveles (raíz + intermedia) y emite un certificado de servidor firmado por la intermedia; configura un servidor TLS de laboratorio que presente la cadena completa. Criterio…</a:t>
             </a:r>
           </a:p>
         </p:txBody>
@@ -3511,7 +3454,7 @@
                   <a:srgbClr val="0B3D2E"/>
                 </a:solidFill>
               </a:rPr>
-              <a:t>🔗 Referencias</a:t>
+              <a:t>⚠️ Errores comunes</a:t>
             </a:r>
           </a:p>
         </p:txBody>
@@ -3549,6 +3492,319 @@
                   <a:srgbClr val="22282E"/>
                 </a:solidFill>
               </a:rPr>
+              <a:t>•  unable to get local issuer certificate — Falta la intermedia; incluye la cadena completa</a:t>
+            </a:r>
+          </a:p>
+          <a:p>
+            <a:pPr>
+              <a:spcAft>
+                <a:spcPts val="600"/>
+              </a:spcAft>
+            </a:pPr>
+            <a:r>
+              <a:rPr sz="1500">
+                <a:solidFill>
+                  <a:srgbClr val="22282E"/>
+                </a:solidFill>
+              </a:rPr>
+              <a:t>•  Navegador rechaza el certificado — CN sin SAN; los navegadores exigen SAN</a:t>
+            </a:r>
+          </a:p>
+          <a:p>
+            <a:pPr>
+              <a:spcAft>
+                <a:spcPts val="600"/>
+              </a:spcAft>
+            </a:pPr>
+            <a:r>
+              <a:rPr sz="1500">
+                <a:solidFill>
+                  <a:srgbClr val="22282E"/>
+                </a:solidFill>
+              </a:rPr>
+              <a:t>•  certificate has expired — Validez vencida; reemite</a:t>
+            </a:r>
+          </a:p>
+          <a:p>
+            <a:pPr>
+              <a:spcAft>
+                <a:spcPts val="600"/>
+              </a:spcAft>
+            </a:pPr>
+            <a:r>
+              <a:rPr sz="1500">
+                <a:solidFill>
+                  <a:srgbClr val="22282E"/>
+                </a:solidFill>
+              </a:rPr>
+              <a:t>•  Confiar en la raíz de laboratorio en producción — Nunca; usa CAs públicas reales</a:t>
+            </a:r>
+          </a:p>
+          <a:p>
+            <a:pPr>
+              <a:spcAft>
+                <a:spcPts val="600"/>
+              </a:spcAft>
+            </a:pPr>
+            <a:r>
+              <a:rPr sz="1500">
+                <a:solidFill>
+                  <a:srgbClr val="22282E"/>
+                </a:solidFill>
+              </a:rPr>
+              <a:t>•  No revocar tras compromiso de clave — Publica CRL/OCSP y reemite</a:t>
+            </a:r>
+          </a:p>
+        </p:txBody>
+      </p:sp>
+    </p:spTree>
+  </p:cSld>
+  <p:clrMapOvr>
+    <a:masterClrMapping/>
+  </p:clrMapOvr>
+</p:sld>
+</file>
+
+<file path=ppt/slides/slide13.xml><?xml version="1.0" encoding="utf-8"?>
+<p:sld xmlns:a="http://schemas.openxmlformats.org/drawingml/2006/main" xmlns:p="http://schemas.openxmlformats.org/presentationml/2006/main" xmlns:r="http://schemas.openxmlformats.org/officeDocument/2006/relationships">
+  <p:cSld>
+    <p:spTree>
+      <p:nvGrpSpPr>
+        <p:cNvPr id="1" name=""/>
+        <p:cNvGrpSpPr/>
+        <p:nvPr/>
+      </p:nvGrpSpPr>
+      <p:grpSpPr/>
+      <p:sp>
+        <p:nvSpPr>
+          <p:cNvPr id="2" name="TextBox 1"/>
+          <p:cNvSpPr txBox="1"/>
+          <p:nvPr/>
+        </p:nvSpPr>
+        <p:spPr>
+          <a:xfrm>
+            <a:off x="457200" y="320040"/>
+            <a:ext cx="8229600" cy="822960"/>
+          </a:xfrm>
+          <a:prstGeom prst="rect">
+            <a:avLst/>
+          </a:prstGeom>
+          <a:noFill/>
+        </p:spPr>
+        <p:txBody>
+          <a:bodyPr wrap="square">
+            <a:spAutoFit/>
+          </a:bodyPr>
+          <a:lstStyle/>
+          <a:p>
+            <a:r>
+              <a:rPr sz="2600" b="1">
+                <a:solidFill>
+                  <a:srgbClr val="0B3D2E"/>
+                </a:solidFill>
+              </a:rPr>
+              <a:t>❓ Preguntas frecuentes</a:t>
+            </a:r>
+          </a:p>
+        </p:txBody>
+      </p:sp>
+      <p:sp>
+        <p:nvSpPr>
+          <p:cNvPr id="3" name="TextBox 2"/>
+          <p:cNvSpPr txBox="1"/>
+          <p:nvPr/>
+        </p:nvSpPr>
+        <p:spPr>
+          <a:xfrm>
+            <a:off x="457200" y="1280160"/>
+            <a:ext cx="8229600" cy="4937760"/>
+          </a:xfrm>
+          <a:prstGeom prst="rect">
+            <a:avLst/>
+          </a:prstGeom>
+          <a:noFill/>
+        </p:spPr>
+        <p:txBody>
+          <a:bodyPr wrap="square">
+            <a:spAutoFit/>
+          </a:bodyPr>
+          <a:lstStyle/>
+          <a:p>
+            <a:pPr>
+              <a:spcAft>
+                <a:spcPts val="600"/>
+              </a:spcAft>
+            </a:pPr>
+            <a:r>
+              <a:rPr sz="1500">
+                <a:solidFill>
+                  <a:srgbClr val="22282E"/>
+                </a:solidFill>
+              </a:rPr>
+              <a:t>•  ❓ ¿Por qué hay CAs intermedias?</a:t>
+            </a:r>
+          </a:p>
+          <a:p>
+            <a:pPr>
+              <a:spcAft>
+                <a:spcPts val="600"/>
+              </a:spcAft>
+            </a:pPr>
+            <a:r>
+              <a:rPr sz="1500">
+                <a:solidFill>
+                  <a:srgbClr val="22282E"/>
+                </a:solidFill>
+              </a:rPr>
+              <a:t>•  Para proteger la raíz (offline) y limitar el daño si se compromete una intermedia, que puede revocarse.</a:t>
+            </a:r>
+          </a:p>
+          <a:p>
+            <a:pPr>
+              <a:spcAft>
+                <a:spcPts val="600"/>
+              </a:spcAft>
+            </a:pPr>
+            <a:r>
+              <a:rPr sz="1500">
+                <a:solidFill>
+                  <a:srgbClr val="22282E"/>
+                </a:solidFill>
+              </a:rPr>
+              <a:t>•  ❓ ¿Cómo confía mi navegador en un sitio?</a:t>
+            </a:r>
+          </a:p>
+          <a:p>
+            <a:pPr>
+              <a:spcAft>
+                <a:spcPts val="600"/>
+              </a:spcAft>
+            </a:pPr>
+            <a:r>
+              <a:rPr sz="1500">
+                <a:solidFill>
+                  <a:srgbClr val="22282E"/>
+                </a:solidFill>
+              </a:rPr>
+              <a:t>•  Valida la cadena de firmas hasta una raíz de su almacén de confianza, comprueba validez, SAN y revocación.</a:t>
+            </a:r>
+          </a:p>
+          <a:p>
+            <a:pPr>
+              <a:spcAft>
+                <a:spcPts val="600"/>
+              </a:spcAft>
+            </a:pPr>
+            <a:r>
+              <a:rPr sz="1500">
+                <a:solidFill>
+                  <a:srgbClr val="22282E"/>
+                </a:solidFill>
+              </a:rPr>
+              <a:t>•  ❓ ¿Qué es el certificate pinning?</a:t>
+            </a:r>
+          </a:p>
+          <a:p>
+            <a:pPr>
+              <a:spcAft>
+                <a:spcPts val="600"/>
+              </a:spcAft>
+            </a:pPr>
+            <a:r>
+              <a:rPr sz="1500">
+                <a:solidFill>
+                  <a:srgbClr val="22282E"/>
+                </a:solidFill>
+              </a:rPr>
+              <a:t>•  Fijar una clave/certificado esperado en la app para no depender solo de la PKI; reduce el riesgo de CA comprometida.</a:t>
+            </a:r>
+          </a:p>
+        </p:txBody>
+      </p:sp>
+    </p:spTree>
+  </p:cSld>
+  <p:clrMapOvr>
+    <a:masterClrMapping/>
+  </p:clrMapOvr>
+</p:sld>
+</file>
+
+<file path=ppt/slides/slide14.xml><?xml version="1.0" encoding="utf-8"?>
+<p:sld xmlns:a="http://schemas.openxmlformats.org/drawingml/2006/main" xmlns:p="http://schemas.openxmlformats.org/presentationml/2006/main" xmlns:r="http://schemas.openxmlformats.org/officeDocument/2006/relationships">
+  <p:cSld>
+    <p:spTree>
+      <p:nvGrpSpPr>
+        <p:cNvPr id="1" name=""/>
+        <p:cNvGrpSpPr/>
+        <p:nvPr/>
+      </p:nvGrpSpPr>
+      <p:grpSpPr/>
+      <p:sp>
+        <p:nvSpPr>
+          <p:cNvPr id="2" name="TextBox 1"/>
+          <p:cNvSpPr txBox="1"/>
+          <p:nvPr/>
+        </p:nvSpPr>
+        <p:spPr>
+          <a:xfrm>
+            <a:off x="457200" y="320040"/>
+            <a:ext cx="8229600" cy="822960"/>
+          </a:xfrm>
+          <a:prstGeom prst="rect">
+            <a:avLst/>
+          </a:prstGeom>
+          <a:noFill/>
+        </p:spPr>
+        <p:txBody>
+          <a:bodyPr wrap="square">
+            <a:spAutoFit/>
+          </a:bodyPr>
+          <a:lstStyle/>
+          <a:p>
+            <a:r>
+              <a:rPr sz="2600" b="1">
+                <a:solidFill>
+                  <a:srgbClr val="0B3D2E"/>
+                </a:solidFill>
+              </a:rPr>
+              <a:t>🔗 Referencias</a:t>
+            </a:r>
+          </a:p>
+        </p:txBody>
+      </p:sp>
+      <p:sp>
+        <p:nvSpPr>
+          <p:cNvPr id="3" name="TextBox 2"/>
+          <p:cNvSpPr txBox="1"/>
+          <p:nvPr/>
+        </p:nvSpPr>
+        <p:spPr>
+          <a:xfrm>
+            <a:off x="457200" y="1280160"/>
+            <a:ext cx="8229600" cy="4937760"/>
+          </a:xfrm>
+          <a:prstGeom prst="rect">
+            <a:avLst/>
+          </a:prstGeom>
+          <a:noFill/>
+        </p:spPr>
+        <p:txBody>
+          <a:bodyPr wrap="square">
+            <a:spAutoFit/>
+          </a:bodyPr>
+          <a:lstStyle/>
+          <a:p>
+            <a:pPr>
+              <a:spcAft>
+                <a:spcPts val="600"/>
+              </a:spcAft>
+            </a:pPr>
+            <a:r>
+              <a:rPr sz="1500">
+                <a:solidFill>
+                  <a:srgbClr val="22282E"/>
+                </a:solidFill>
+              </a:rPr>
               <a:t>•  IETF RFC 5280 (X.509) — &lt;https://www.rfc-editor.org/rfc/rfc5280&gt;</a:t>
             </a:r>
           </a:p>
@@ -3599,6 +3855,81 @@
           </a:p>
         </p:txBody>
       </p:sp>
+    </p:spTree>
+  </p:cSld>
+  <p:clrMapOvr>
+    <a:masterClrMapping/>
+  </p:clrMapOvr>
+</p:sld>
+</file>
+
+<file path=ppt/slides/slide15.xml><?xml version="1.0" encoding="utf-8"?>
+<p:sld xmlns:a="http://schemas.openxmlformats.org/drawingml/2006/main" xmlns:p="http://schemas.openxmlformats.org/presentationml/2006/main" xmlns:r="http://schemas.openxmlformats.org/officeDocument/2006/relationships">
+  <p:cSld>
+    <p:spTree>
+      <p:nvGrpSpPr>
+        <p:cNvPr id="1" name=""/>
+        <p:cNvGrpSpPr/>
+        <p:nvPr/>
+      </p:nvGrpSpPr>
+      <p:grpSpPr/>
+      <p:sp>
+        <p:nvSpPr>
+          <p:cNvPr id="2" name="TextBox 1"/>
+          <p:cNvSpPr txBox="1"/>
+          <p:nvPr/>
+        </p:nvSpPr>
+        <p:spPr>
+          <a:xfrm>
+            <a:off x="457200" y="274320"/>
+            <a:ext cx="8229600" cy="640080"/>
+          </a:xfrm>
+          <a:prstGeom prst="rect">
+            <a:avLst/>
+          </a:prstGeom>
+          <a:noFill/>
+        </p:spPr>
+        <p:txBody>
+          <a:bodyPr wrap="square">
+            <a:spAutoFit/>
+          </a:bodyPr>
+          <a:lstStyle/>
+          <a:p>
+            <a:r>
+              <a:rPr sz="2200" b="1">
+                <a:solidFill>
+                  <a:srgbClr val="0B3D2E"/>
+                </a:solidFill>
+              </a:rPr>
+              <a:t>Diagrama de la clase</a:t>
+            </a:r>
+          </a:p>
+        </p:txBody>
+      </p:sp>
+      <p:pic>
+        <p:nvPicPr>
+          <p:cNvPr id="3" name="Picture 2" descr="7b8915fb448d1c2b.png"/>
+          <p:cNvPicPr>
+            <a:picLocks noChangeAspect="1"/>
+          </p:cNvPicPr>
+          <p:nvPr/>
+        </p:nvPicPr>
+        <p:blipFill>
+          <a:blip r:embed="rId2"/>
+          <a:stretch>
+            <a:fillRect/>
+          </a:stretch>
+        </p:blipFill>
+        <p:spPr>
+          <a:xfrm>
+            <a:off x="1067471" y="1097280"/>
+            <a:ext cx="7009057" cy="5303520"/>
+          </a:xfrm>
+          <a:prstGeom prst="rect">
+            <a:avLst/>
+          </a:prstGeom>
+        </p:spPr>
+      </p:pic>
     </p:spTree>
   </p:cSld>
   <p:clrMapOvr>
@@ -3683,7 +4014,7 @@
                   <a:srgbClr val="22282E"/>
                 </a:solidFill>
               </a:rPr>
-              <a:t>•  Comprender cómo se resuelve el problema de "¿de quién es esta clave pública?" mediante la infraestructura de clave pública (PKI): certificados X.509, autoridades de certificación (CA), cadenas de confianza, y mecanismos de revocación (CRL, OCSP). El alumno construirá su propia CA de laboratorio con OpenSSL, emitirá certificados y comprenderá cómo el navegador valida una cadena hasta una raíz de confianza.</a:t>
+              <a:t>•  Comprender cómo se resuelve el problema de "¿de quién es esta clave pública?" mediante la infraestructura de clave pública (PKI): certificados X.509, autoridades de certificación (CA), cadenas de…</a:t>
             </a:r>
           </a:p>
         </p:txBody>
@@ -4077,7 +4408,7 @@
                   <a:srgbClr val="0B3D2E"/>
                 </a:solidFill>
               </a:rPr>
-              <a:t>📖 Definiciones y características</a:t>
+              <a:t>🧠 Explicación en profundidad</a:t>
             </a:r>
           </a:p>
         </p:txBody>
@@ -4115,97 +4446,97 @@
                   <a:srgbClr val="22282E"/>
                 </a:solidFill>
               </a:rPr>
-              <a:t>•  PKI: conjunto de roles, políticas y procedimientos para gestionar certificados de clave pública. Característica: escala la confianza mediante CAs.</a:t>
-            </a:r>
-          </a:p>
-          <a:p>
-            <a:pPr>
-              <a:spcAft>
-                <a:spcPts val="600"/>
-              </a:spcAft>
-            </a:pPr>
-            <a:r>
-              <a:rPr sz="1500">
-                <a:solidFill>
-                  <a:srgbClr val="22282E"/>
-                </a:solidFill>
-              </a:rPr>
-              <a:t>•  Certificado X.509: documento firmado por una CA que vincula una identidad (dominio) con una clave pública, con validez y extensiones (SAN, uso de clave).</a:t>
-            </a:r>
-          </a:p>
-          <a:p>
-            <a:pPr>
-              <a:spcAft>
-                <a:spcPts val="600"/>
-              </a:spcAft>
-            </a:pPr>
-            <a:r>
-              <a:rPr sz="1500">
-                <a:solidFill>
-                  <a:srgbClr val="22282E"/>
-                </a:solidFill>
-              </a:rPr>
-              <a:t>•  Autoridad de certificación (CA): entidad de confianza que firma certificados. Su clave raíz está preinstalada en sistemas y navegadores.</a:t>
-            </a:r>
-          </a:p>
-          <a:p>
-            <a:pPr>
-              <a:spcAft>
-                <a:spcPts val="600"/>
-              </a:spcAft>
-            </a:pPr>
-            <a:r>
-              <a:rPr sz="1500">
-                <a:solidFill>
-                  <a:srgbClr val="22282E"/>
-                </a:solidFill>
-              </a:rPr>
-              <a:t>•  Cadena de confianza: raíz → intermedia(s) → hoja; se valida cada firma hasta un ancla de confianza.</a:t>
-            </a:r>
-          </a:p>
-          <a:p>
-            <a:pPr>
-              <a:spcAft>
-                <a:spcPts val="600"/>
-              </a:spcAft>
-            </a:pPr>
-            <a:r>
-              <a:rPr sz="1500">
-                <a:solidFill>
-                  <a:srgbClr val="22282E"/>
-                </a:solidFill>
-              </a:rPr>
-              <a:t>•  CSR (Certificate Signing Request): solicitud que contiene la clave pública y datos del solicitante; la CA la firma.</a:t>
-            </a:r>
-          </a:p>
-          <a:p>
-            <a:pPr>
-              <a:spcAft>
-                <a:spcPts val="600"/>
-              </a:spcAft>
-            </a:pPr>
-            <a:r>
-              <a:rPr sz="1500">
-                <a:solidFill>
-                  <a:srgbClr val="22282E"/>
-                </a:solidFill>
-              </a:rPr>
-              <a:t>•  CRL / OCSP: listas de revocación y consulta en línea del estado de un certificado. OCSP stapling adjunta la respuesta al handshake.</a:t>
-            </a:r>
-          </a:p>
-          <a:p>
-            <a:pPr>
-              <a:spcAft>
-                <a:spcPts val="600"/>
-              </a:spcAft>
-            </a:pPr>
-            <a:r>
-              <a:rPr sz="1500">
-                <a:solidFill>
-                  <a:srgbClr val="22282E"/>
-                </a:solidFill>
-              </a:rPr>
-              <a:t>•  Certificate Transparency (CT): registros públicos y auditables de certificados emitidos, para detectar emisiones fraudulentas.</a:t>
+              <a:t>•  Tener una clave pública no sirve de nada si no sabes de quién es. Si un atacante te</a:t>
+            </a:r>
+          </a:p>
+          <a:p>
+            <a:pPr>
+              <a:spcAft>
+                <a:spcPts val="600"/>
+              </a:spcAft>
+            </a:pPr>
+            <a:r>
+              <a:rPr sz="1500">
+                <a:solidFill>
+                  <a:srgbClr val="22282E"/>
+                </a:solidFill>
+              </a:rPr>
+              <a:t>•  entrega su clave diciendo que es la de tu banco, cifrarás para él y verificarás sus firmas</a:t>
+            </a:r>
+          </a:p>
+          <a:p>
+            <a:pPr>
+              <a:spcAft>
+                <a:spcPts val="600"/>
+              </a:spcAft>
+            </a:pPr>
+            <a:r>
+              <a:rPr sz="1500">
+                <a:solidFill>
+                  <a:srgbClr val="22282E"/>
+                </a:solidFill>
+              </a:rPr>
+              <a:t>•  tan felizmente como lo harías con las auténticas. Ese es el problema de la distribución</a:t>
+            </a:r>
+          </a:p>
+          <a:p>
+            <a:pPr>
+              <a:spcAft>
+                <a:spcPts val="600"/>
+              </a:spcAft>
+            </a:pPr>
+            <a:r>
+              <a:rPr sz="1500">
+                <a:solidFill>
+                  <a:srgbClr val="22282E"/>
+                </a:solidFill>
+              </a:rPr>
+              <a:t>•  de confianza, y la PKI es la respuesta industrial: una jerarquía de autoridades que</a:t>
+            </a:r>
+          </a:p>
+          <a:p>
+            <a:pPr>
+              <a:spcAft>
+                <a:spcPts val="600"/>
+              </a:spcAft>
+            </a:pPr>
+            <a:r>
+              <a:rPr sz="1500">
+                <a:solidFill>
+                  <a:srgbClr val="22282E"/>
+                </a:solidFill>
+              </a:rPr>
+              <a:t>•  avalan, con su propia firma, que una clave pública pertenece a una identidad concreta.</a:t>
+            </a:r>
+          </a:p>
+          <a:p>
+            <a:pPr>
+              <a:spcAft>
+                <a:spcPts val="600"/>
+              </a:spcAft>
+            </a:pPr>
+            <a:r>
+              <a:rPr sz="1500">
+                <a:solidFill>
+                  <a:srgbClr val="22282E"/>
+                </a:solidFill>
+              </a:rPr>
+              <a:t>•  El vehículo de ese aval es el certificado X.509: un documento estructurado que contiene</a:t>
+            </a:r>
+          </a:p>
+          <a:p>
+            <a:pPr>
+              <a:spcAft>
+                <a:spcPts val="600"/>
+              </a:spcAft>
+            </a:pPr>
+            <a:r>
+              <a:rPr sz="1500">
+                <a:solidFill>
+                  <a:srgbClr val="22282E"/>
+                </a:solidFill>
+              </a:rPr>
+              <a:t>•  la clave pública, el sujeto al que pertenece (Subject, y los nombres alternativos SAN,</a:t>
             </a:r>
           </a:p>
         </p:txBody>
@@ -4256,7 +4587,7 @@
                   <a:srgbClr val="0B3D2E"/>
                 </a:solidFill>
               </a:rPr>
-              <a:t>🧰 Herramientas y preparación</a:t>
+              <a:t>📖 Definiciones y características</a:t>
             </a:r>
           </a:p>
         </p:txBody>
@@ -4294,22 +4625,97 @@
                   <a:srgbClr val="22282E"/>
                 </a:solidFill>
               </a:rPr>
-              <a:t>•  openssl version</a:t>
-            </a:r>
-          </a:p>
-          <a:p>
-            <a:pPr>
-              <a:spcAft>
-                <a:spcPts val="600"/>
-              </a:spcAft>
-            </a:pPr>
-            <a:r>
-              <a:rPr sz="1500">
-                <a:solidFill>
-                  <a:srgbClr val="22282E"/>
-                </a:solidFill>
-              </a:rPr>
-              <a:t>•  Toda la PKI es de laboratorio: son certificados propios que no serán confiados por navegadores reales, y así debe ser.</a:t>
+              <a:t>•  PKI: conjunto de roles, políticas y procedimientos para gestionar certificados de clave pública. Característica: escala la confianza mediante CAs.</a:t>
+            </a:r>
+          </a:p>
+          <a:p>
+            <a:pPr>
+              <a:spcAft>
+                <a:spcPts val="600"/>
+              </a:spcAft>
+            </a:pPr>
+            <a:r>
+              <a:rPr sz="1500">
+                <a:solidFill>
+                  <a:srgbClr val="22282E"/>
+                </a:solidFill>
+              </a:rPr>
+              <a:t>•  Certificado X.509: documento firmado por una CA que vincula una identidad (dominio) con una clave pública, con validez y extensiones (SAN, uso de clave).</a:t>
+            </a:r>
+          </a:p>
+          <a:p>
+            <a:pPr>
+              <a:spcAft>
+                <a:spcPts val="600"/>
+              </a:spcAft>
+            </a:pPr>
+            <a:r>
+              <a:rPr sz="1500">
+                <a:solidFill>
+                  <a:srgbClr val="22282E"/>
+                </a:solidFill>
+              </a:rPr>
+              <a:t>•  Autoridad de certificación (CA): entidad de confianza que firma certificados. Su clave raíz está preinstalada en sistemas y navegadores.</a:t>
+            </a:r>
+          </a:p>
+          <a:p>
+            <a:pPr>
+              <a:spcAft>
+                <a:spcPts val="600"/>
+              </a:spcAft>
+            </a:pPr>
+            <a:r>
+              <a:rPr sz="1500">
+                <a:solidFill>
+                  <a:srgbClr val="22282E"/>
+                </a:solidFill>
+              </a:rPr>
+              <a:t>•  Cadena de confianza: raíz → intermedia(s) → hoja; se valida cada firma hasta un ancla de confianza.</a:t>
+            </a:r>
+          </a:p>
+          <a:p>
+            <a:pPr>
+              <a:spcAft>
+                <a:spcPts val="600"/>
+              </a:spcAft>
+            </a:pPr>
+            <a:r>
+              <a:rPr sz="1500">
+                <a:solidFill>
+                  <a:srgbClr val="22282E"/>
+                </a:solidFill>
+              </a:rPr>
+              <a:t>•  CSR (Certificate Signing Request): solicitud que contiene la clave pública y datos del solicitante; la CA la firma.</a:t>
+            </a:r>
+          </a:p>
+          <a:p>
+            <a:pPr>
+              <a:spcAft>
+                <a:spcPts val="600"/>
+              </a:spcAft>
+            </a:pPr>
+            <a:r>
+              <a:rPr sz="1500">
+                <a:solidFill>
+                  <a:srgbClr val="22282E"/>
+                </a:solidFill>
+              </a:rPr>
+              <a:t>•  CRL / OCSP: listas de revocación y consulta en línea del estado de un certificado. OCSP stapling adjunta la respuesta al handshake.</a:t>
+            </a:r>
+          </a:p>
+          <a:p>
+            <a:pPr>
+              <a:spcAft>
+                <a:spcPts val="600"/>
+              </a:spcAft>
+            </a:pPr>
+            <a:r>
+              <a:rPr sz="1500">
+                <a:solidFill>
+                  <a:srgbClr val="22282E"/>
+                </a:solidFill>
+              </a:rPr>
+              <a:t>•  Certificate Transparency (CT): registros públicos y auditables de certificados emitidos, para detectar emisiones fraudulentas.</a:t>
             </a:r>
           </a:p>
         </p:txBody>
@@ -4360,7 +4766,7 @@
                   <a:srgbClr val="0B3D2E"/>
                 </a:solidFill>
               </a:rPr>
-              <a:t>🧪 Laboratorio guiado</a:t>
+              <a:t>📔 Glosario</a:t>
             </a:r>
           </a:p>
         </p:txBody>
@@ -4398,97 +4804,97 @@
                   <a:srgbClr val="22282E"/>
                 </a:solidFill>
               </a:rPr>
-              <a:t>•  Crea tu CA raíz:</a:t>
-            </a:r>
-          </a:p>
-          <a:p>
-            <a:pPr>
-              <a:spcAft>
-                <a:spcPts val="600"/>
-              </a:spcAft>
-            </a:pPr>
-            <a:r>
-              <a:rPr sz="1500">
-                <a:solidFill>
-                  <a:srgbClr val="22282E"/>
-                </a:solidFill>
-              </a:rPr>
-              <a:t>•  openssl genpkey -algorithm RSA -pkeyopt rsakeygenbits:4096 -out ca.key</a:t>
-            </a:r>
-          </a:p>
-          <a:p>
-            <a:pPr>
-              <a:spcAft>
-                <a:spcPts val="600"/>
-              </a:spcAft>
-            </a:pPr>
-            <a:r>
-              <a:rPr sz="1500">
-                <a:solidFill>
-                  <a:srgbClr val="22282E"/>
-                </a:solidFill>
-              </a:rPr>
-              <a:t>•  openssl req -x509 -new -key ca.key -sha256 -days 3650 \</a:t>
-            </a:r>
-          </a:p>
-          <a:p>
-            <a:pPr>
-              <a:spcAft>
-                <a:spcPts val="600"/>
-              </a:spcAft>
-            </a:pPr>
-            <a:r>
-              <a:rPr sz="1500">
-                <a:solidFill>
-                  <a:srgbClr val="22282E"/>
-                </a:solidFill>
-              </a:rPr>
-              <a:t>•  -subj "/CN=Lab Root CA" -out ca.crt</a:t>
-            </a:r>
-          </a:p>
-          <a:p>
-            <a:pPr>
-              <a:spcAft>
-                <a:spcPts val="600"/>
-              </a:spcAft>
-            </a:pPr>
-            <a:r>
-              <a:rPr sz="1500">
-                <a:solidFill>
-                  <a:srgbClr val="22282E"/>
-                </a:solidFill>
-              </a:rPr>
-              <a:t>•  Genera clave y CSR del servidor:</a:t>
-            </a:r>
-          </a:p>
-          <a:p>
-            <a:pPr>
-              <a:spcAft>
-                <a:spcPts val="600"/>
-              </a:spcAft>
-            </a:pPr>
-            <a:r>
-              <a:rPr sz="1500">
-                <a:solidFill>
-                  <a:srgbClr val="22282E"/>
-                </a:solidFill>
-              </a:rPr>
-              <a:t>•  openssl genpkey -algorithm RSA -pkeyopt rsakeygenbits:2048 -out srv.key</a:t>
-            </a:r>
-          </a:p>
-          <a:p>
-            <a:pPr>
-              <a:spcAft>
-                <a:spcPts val="600"/>
-              </a:spcAft>
-            </a:pPr>
-            <a:r>
-              <a:rPr sz="1500">
-                <a:solidFill>
-                  <a:srgbClr val="22282E"/>
-                </a:solidFill>
-              </a:rPr>
-              <a:t>•  openssl req -new -key srv.key -subj "/CN=lab.local" -out srv.csr</a:t>
+              <a:t>•  Término — Definición concisa</a:t>
+            </a:r>
+          </a:p>
+          <a:p>
+            <a:pPr>
+              <a:spcAft>
+                <a:spcPts val="600"/>
+              </a:spcAft>
+            </a:pPr>
+            <a:r>
+              <a:rPr sz="1500">
+                <a:solidFill>
+                  <a:srgbClr val="22282E"/>
+                </a:solidFill>
+              </a:rPr>
+              <a:t>•  PKI — Infraestructura que vincula claves públicas con identidades</a:t>
+            </a:r>
+          </a:p>
+          <a:p>
+            <a:pPr>
+              <a:spcAft>
+                <a:spcPts val="600"/>
+              </a:spcAft>
+            </a:pPr>
+            <a:r>
+              <a:rPr sz="1500">
+                <a:solidFill>
+                  <a:srgbClr val="22282E"/>
+                </a:solidFill>
+              </a:rPr>
+              <a:t>•  Certificado X.509 — Documento con clave pública, identidad y firma de la CA</a:t>
+            </a:r>
+          </a:p>
+          <a:p>
+            <a:pPr>
+              <a:spcAft>
+                <a:spcPts val="600"/>
+              </a:spcAft>
+            </a:pPr>
+            <a:r>
+              <a:rPr sz="1500">
+                <a:solidFill>
+                  <a:srgbClr val="22282E"/>
+                </a:solidFill>
+              </a:rPr>
+              <a:t>•  Subject / SAN — Identidad del titular; los SAN son los nombres que se validan</a:t>
+            </a:r>
+          </a:p>
+          <a:p>
+            <a:pPr>
+              <a:spcAft>
+                <a:spcPts val="600"/>
+              </a:spcAft>
+            </a:pPr>
+            <a:r>
+              <a:rPr sz="1500">
+                <a:solidFill>
+                  <a:srgbClr val="22282E"/>
+                </a:solidFill>
+              </a:rPr>
+              <a:t>•  CA — Autoridad de certificación que firma certificados</a:t>
+            </a:r>
+          </a:p>
+          <a:p>
+            <a:pPr>
+              <a:spcAft>
+                <a:spcPts val="600"/>
+              </a:spcAft>
+            </a:pPr>
+            <a:r>
+              <a:rPr sz="1500">
+                <a:solidFill>
+                  <a:srgbClr val="22282E"/>
+                </a:solidFill>
+              </a:rPr>
+              <a:t>•  CA raíz — Certificado autofirmado preinstalado; anclaje de confianza</a:t>
+            </a:r>
+          </a:p>
+          <a:p>
+            <a:pPr>
+              <a:spcAft>
+                <a:spcPts val="600"/>
+              </a:spcAft>
+            </a:pPr>
+            <a:r>
+              <a:rPr sz="1500">
+                <a:solidFill>
+                  <a:srgbClr val="22282E"/>
+                </a:solidFill>
+              </a:rPr>
+              <a:t>•  CA intermedia — Firma los certificados finales; protege la clave raíz</a:t>
             </a:r>
           </a:p>
         </p:txBody>
@@ -4539,7 +4945,7 @@
                   <a:srgbClr val="0B3D2E"/>
                 </a:solidFill>
               </a:rPr>
-              <a:t>✍️ Ejercicios</a:t>
+              <a:t>🧰 Herramientas y preparación</a:t>
             </a:r>
           </a:p>
         </p:txBody>
@@ -4577,82 +4983,7 @@
                   <a:srgbClr val="22282E"/>
                 </a:solidFill>
               </a:rPr>
-              <a:t>•  Enumera y explica cinco campos de un certificado X.509 real (openssl x509 -text).</a:t>
-            </a:r>
-          </a:p>
-          <a:p>
-            <a:pPr>
-              <a:spcAft>
-                <a:spcPts val="600"/>
-              </a:spcAft>
-            </a:pPr>
-            <a:r>
-              <a:rPr sz="1500">
-                <a:solidFill>
-                  <a:srgbClr val="22282E"/>
-                </a:solidFill>
-              </a:rPr>
-              <a:t>•  Emite un certificado con varias entradas SAN y verifícalo.</a:t>
-            </a:r>
-          </a:p>
-          <a:p>
-            <a:pPr>
-              <a:spcAft>
-                <a:spcPts val="600"/>
-              </a:spcAft>
-            </a:pPr>
-            <a:r>
-              <a:rPr sz="1500">
-                <a:solidFill>
-                  <a:srgbClr val="22282E"/>
-                </a:solidFill>
-              </a:rPr>
-              <a:t>•  Compara CRL, OCSP y OCSP stapling en latencia y privacidad.</a:t>
-            </a:r>
-          </a:p>
-          <a:p>
-            <a:pPr>
-              <a:spcAft>
-                <a:spcPts val="600"/>
-              </a:spcAft>
-            </a:pPr>
-            <a:r>
-              <a:rPr sz="1500">
-                <a:solidFill>
-                  <a:srgbClr val="22282E"/>
-                </a:solidFill>
-              </a:rPr>
-              <a:t>•  Explica qué ocurre si se compromete la clave de una CA raíz.</a:t>
-            </a:r>
-          </a:p>
-          <a:p>
-            <a:pPr>
-              <a:spcAft>
-                <a:spcPts val="600"/>
-              </a:spcAft>
-            </a:pPr>
-            <a:r>
-              <a:rPr sz="1500">
-                <a:solidFill>
-                  <a:srgbClr val="22282E"/>
-                </a:solidFill>
-              </a:rPr>
-              <a:t>•  Investiga el incidente de DigiNotar y sus consecuencias.</a:t>
-            </a:r>
-          </a:p>
-          <a:p>
-            <a:pPr>
-              <a:spcAft>
-                <a:spcPts val="600"/>
-              </a:spcAft>
-            </a:pPr>
-            <a:r>
-              <a:rPr sz="1500">
-                <a:solidFill>
-                  <a:srgbClr val="22282E"/>
-                </a:solidFill>
-              </a:rPr>
-              <a:t>•  Describe el flujo ACME de Let's Encrypt paso a paso.</a:t>
+              <a:t>•  Toda la PKI es de laboratorio: son certificados propios que no serán confiados por navegadores reales, y así debe ser.</a:t>
             </a:r>
           </a:p>
         </p:txBody>
@@ -4703,7 +5034,7 @@
                   <a:srgbClr val="0B3D2E"/>
                 </a:solidFill>
               </a:rPr>
-              <a:t>📝 Reto verificable</a:t>
+              <a:t>🧪 Laboratorio guiado</a:t>
             </a:r>
           </a:p>
         </p:txBody>
@@ -4741,7 +5072,67 @@
                   <a:srgbClr val="22282E"/>
                 </a:solidFill>
               </a:rPr>
-              <a:t>•  Construye una PKI de dos niveles (raíz + intermedia) y emite un certificado de servidor firmado por la intermedia; configura un servidor TLS de laboratorio que presente la cadena completa. Criterio de aceptación: openssl verify -CAfile ca.crt -untrusted intermedia.crt srv.crt devuelve OK y un cliente valida la cadena hasta la raíz.</a:t>
+              <a:t>•  Crea tu CA raíz:</a:t>
+            </a:r>
+          </a:p>
+          <a:p>
+            <a:pPr>
+              <a:spcAft>
+                <a:spcPts val="600"/>
+              </a:spcAft>
+            </a:pPr>
+            <a:r>
+              <a:rPr sz="1500">
+                <a:solidFill>
+                  <a:srgbClr val="22282E"/>
+                </a:solidFill>
+              </a:rPr>
+              <a:t>•  Genera clave y CSR del servidor:</a:t>
+            </a:r>
+          </a:p>
+          <a:p>
+            <a:pPr>
+              <a:spcAft>
+                <a:spcPts val="600"/>
+              </a:spcAft>
+            </a:pPr>
+            <a:r>
+              <a:rPr sz="1500">
+                <a:solidFill>
+                  <a:srgbClr val="22282E"/>
+                </a:solidFill>
+              </a:rPr>
+              <a:t>•  Firma el certificado del servidor con la CA (con SAN):</a:t>
+            </a:r>
+          </a:p>
+          <a:p>
+            <a:pPr>
+              <a:spcAft>
+                <a:spcPts val="600"/>
+              </a:spcAft>
+            </a:pPr>
+            <a:r>
+              <a:rPr sz="1500">
+                <a:solidFill>
+                  <a:srgbClr val="22282E"/>
+                </a:solidFill>
+              </a:rPr>
+              <a:t>•  Inspecciona y valida la cadena:</a:t>
+            </a:r>
+          </a:p>
+          <a:p>
+            <a:pPr>
+              <a:spcAft>
+                <a:spcPts val="600"/>
+              </a:spcAft>
+            </a:pPr>
+            <a:r>
+              <a:rPr sz="1500">
+                <a:solidFill>
+                  <a:srgbClr val="22282E"/>
+                </a:solidFill>
+              </a:rPr>
+              <a:t>•  Explora Certificate Transparency. Consulta un registro público (por ejemplo crt.sh en el navegador) para un dominio y observa cuántos certificados se han emitido; discute cómo esto detecta…</a:t>
             </a:r>
           </a:p>
         </p:txBody>
